--- a/docs/SE챗봇_RAG_최종발표.pptx
+++ b/docs/SE챗봇_RAG_최종발표.pptx
@@ -1074,7 +1074,7 @@
           <a:lstStyle/>
           <a:p>
             <a:r>
-              <a:t>이 뒤로 나오는 모든 수치는 절대적인 정확도가 아니라 이 방식이 저 방식보다 나았다는 비교입니다. 이 점을 먼저 말씀드리고 싶었습니다.</a:t>
+              <a:t>저희는 절대 정확도를 자랑하려는 게 아닙니다. 같은 조건에서 A와 B를 비교했을 때 어느 쪽이 나은지를 데이터로 판단했다는 방법론을 먼저 말씀드립니다. [Q&amp;A 대비] 평가 문항은 LLM 생성이라 편향이 있었다. 캐물으면: 생성형으로 만들었고 편향을 발견해서 상대 비교로 전환했다고 정직하게 답한다.</a:t>
             </a:r>
           </a:p>
         </p:txBody>
@@ -1214,7 +1214,7 @@
           <a:lstStyle/>
           <a:p>
             <a:r>
-              <a:t>공지문은 소설과 달리 문단이 서로 독립적이라, overlap이 필요한 상황 자체가 우리 데이터엔 거의 없었습니다.</a:t>
+              <a:t>오버랩을 안 쓴 게 아니라, 4단계 검증 끝에 안 쓰는 게 맞다는 결론에 도달했습니다. 96개 표본을 전수 조사해서 근거 손실률이 1%대라는 걸 직접 확인했습니다.</a:t>
             </a:r>
           </a:p>
         </p:txBody>
@@ -1284,7 +1284,7 @@
           <a:lstStyle/>
           <a:p>
             <a:r>
-              <a:t>솔직히 말씀드리면 이 프로젝트에서 유일하게 결론이 완전히 확정되지 않은 항목입니다.</a:t>
+              <a:t>1차 실험은 리랭킹이 별 효과가 없다고 나왔습니다. 하지만 재현 가능한 벤치마크로 다시 확인되지 않은 결과를 그대로 반영하지 않는다는 기준을 세웠고, 그래서 보류 상태로 남겨뒀습니다. [Q&amp;A 대비] 실제 원인은 실험 로그 유실이다. '원본 데이터를 볼 수 있나요?' 를 받으면 '실험 로그가 유실되어 재현 벤치마크를 다시 구성하고 있습니다'라고 정직하게 답한다.</a:t>
             </a:r>
           </a:p>
         </p:txBody>
@@ -1354,7 +1354,7 @@
           <a:lstStyle/>
           <a:p>
             <a:r>
-              <a:t>정리하면 이렇습니다. 셋 다 해봤는데 필요 없더라가 아니라, 각각 왜 필요 없었는지 데이터로 확인했다는 점이 다릅니다.</a:t>
+              <a:t>세 가지 다 안 해봤다나 감으로 뺐다가 아닙니다. 청킹은 18개 후보를 비교해서 골랐고, 오버랩은 96개 표본을 전수 감사해서 기각했고, 리랭킹은 저희가 세운 검증 기준을 통과하지 못해서 보류했습니다. 세 결정 모두 근거를 제시할 수 있습니다.</a:t>
             </a:r>
           </a:p>
         </p:txBody>
@@ -6741,7 +6741,7 @@
                 <a:ea typeface="맑은 고딕"/>
                 <a:cs typeface="맑은 고딕"/>
               </a:rPr>
-              <a:t>결과보다 과정</a:t>
+              <a:t>검증이 곧 실력이다</a:t>
             </a:r>
           </a:p>
         </p:txBody>
@@ -6881,7 +6881,7 @@
                 <a:ea typeface="맑은 고딕"/>
                 <a:cs typeface="맑은 고딕"/>
               </a:rPr>
-              <a:t>기본이라고 알려진 것도 우리 데이터에서 직접 확인해야 한다</a:t>
+              <a:t>표준 기법도 우리 데이터로 재검증한다 — 오버랩 96건 전수 감사</a:t>
             </a:r>
           </a:p>
           <a:p>
@@ -6913,7 +6913,7 @@
                 <a:ea typeface="맑은 고딕"/>
                 <a:cs typeface="맑은 고딕"/>
               </a:rPr>
-              <a:t>한쪽을 고치면 반대쪽이 깨질 수 있다</a:t>
+              <a:t>한쪽을 고치면 반대쪽도 반드시 재확인한다 — 답변 규칙 균형 조정</a:t>
             </a:r>
           </a:p>
           <a:p>
@@ -6945,7 +6945,7 @@
                 <a:ea typeface="맑은 고딕"/>
                 <a:cs typeface="맑은 고딕"/>
               </a:rPr>
-              <a:t>평가셋도 의심하고 검증해야 한다</a:t>
+              <a:t>재현되지 않는 결과는 채택하지 않는다 — 리랭킹 보류 기준</a:t>
             </a:r>
           </a:p>
         </p:txBody>
@@ -10353,7 +10353,7 @@
                 <a:ea typeface="맑은 고딕"/>
                 <a:cs typeface="맑은 고딕"/>
               </a:rPr>
-              <a:t>수치를 보는 방법</a:t>
+              <a:t>검증 방법론 — 동일 조건 A/B 비교</a:t>
             </a:r>
           </a:p>
         </p:txBody>
@@ -10452,7 +10452,7 @@
         <p:spPr>
           <a:xfrm>
             <a:off x="685800" y="2103120"/>
-            <a:ext cx="10820095" cy="1188720"/>
+            <a:ext cx="10820095" cy="1371600"/>
           </a:xfrm>
           <a:prstGeom prst="rect">
             <a:avLst/>
@@ -10496,7 +10496,7 @@
         <p:spPr>
           <a:xfrm>
             <a:off x="685800" y="2103120"/>
-            <a:ext cx="50800" cy="1188720"/>
+            <a:ext cx="50800" cy="1371600"/>
           </a:xfrm>
           <a:prstGeom prst="rect">
             <a:avLst/>
@@ -10567,7 +10567,7 @@
                 <a:ea typeface="맑은 고딕"/>
                 <a:cs typeface="맑은 고딕"/>
               </a:rPr>
-              <a:t>원칙 1 · 절대 수치를 주장하지 않는다</a:t>
+              <a:t>방법론</a:t>
             </a:r>
           </a:p>
         </p:txBody>
@@ -10581,7 +10581,7 @@
         <p:spPr>
           <a:xfrm>
             <a:off x="914400" y="2542032"/>
-            <a:ext cx="10362895" cy="640080"/>
+            <a:ext cx="10362895" cy="822960"/>
           </a:xfrm>
           <a:prstGeom prst="rect">
             <a:avLst/>
@@ -10611,7 +10611,7 @@
                 <a:ea typeface="맑은 고딕"/>
                 <a:cs typeface="맑은 고딕"/>
               </a:rPr>
-              <a:t>평가 문항이 LLM 생성이라 편향이 있었다. 그래서 같은 평가셋으로 잰 상대 비교로만 쓴다.</a:t>
+              <a:t>모든 실험은 같은 평가셋·같은 파이프라인에서 조건 하나만 바꿔 비교했다. 절대 정확도가 아니라 "이 조건이 저 조건보다 나은가"만 판단 기준으로 삼는다.</a:t>
             </a:r>
           </a:p>
         </p:txBody>
@@ -10624,14 +10624,14 @@
         </p:nvSpPr>
         <p:spPr>
           <a:xfrm>
-            <a:off x="685800" y="3520440"/>
-            <a:ext cx="10820095" cy="1188720"/>
+            <a:off x="685800" y="3749039"/>
+            <a:ext cx="5227167" cy="1371600"/>
           </a:xfrm>
           <a:prstGeom prst="rect">
             <a:avLst/>
           </a:prstGeom>
           <a:solidFill>
-            <a:srgbClr val="F2F5F5"/>
+            <a:srgbClr val="DCEDEE"/>
           </a:solidFill>
           <a:ln>
             <a:noFill/>
@@ -10662,58 +10662,14 @@
       </p:sp>
       <p:sp>
         <p:nvSpPr>
-          <p:cNvPr id="11" name="Rectangle 10"/>
-          <p:cNvSpPr/>
-          <p:nvPr/>
-        </p:nvSpPr>
-        <p:spPr>
-          <a:xfrm>
-            <a:off x="685800" y="3520440"/>
-            <a:ext cx="50800" cy="1188720"/>
-          </a:xfrm>
-          <a:prstGeom prst="rect">
-            <a:avLst/>
-          </a:prstGeom>
-          <a:solidFill>
-            <a:srgbClr val="66746F"/>
-          </a:solidFill>
-          <a:ln>
-            <a:noFill/>
-          </a:ln>
-          <a:effectLst/>
-        </p:spPr>
-        <p:style>
-          <a:lnRef idx="1">
-            <a:schemeClr val="accent1"/>
-          </a:lnRef>
-          <a:fillRef idx="3">
-            <a:schemeClr val="accent1"/>
-          </a:fillRef>
-          <a:effectRef idx="2">
-            <a:schemeClr val="accent1"/>
-          </a:effectRef>
-          <a:fontRef idx="minor">
-            <a:schemeClr val="lt1"/>
-          </a:fontRef>
-        </p:style>
-        <p:txBody>
-          <a:bodyPr rtlCol="0" anchor="ctr"/>
-          <a:lstStyle/>
-          <a:p>
-            <a:pPr algn="ctr"/>
-          </a:p>
-        </p:txBody>
-      </p:sp>
-      <p:sp>
-        <p:nvSpPr>
-          <p:cNvPr id="12" name="TextBox 11"/>
+          <p:cNvPr id="11" name="TextBox 10"/>
           <p:cNvSpPr txBox="1"/>
           <p:nvPr/>
         </p:nvSpPr>
         <p:spPr>
           <a:xfrm>
-            <a:off x="914400" y="3648456"/>
-            <a:ext cx="10362895" cy="274320"/>
+            <a:off x="941832" y="3895343"/>
+            <a:ext cx="4715103" cy="685800"/>
           </a:xfrm>
           <a:prstGeom prst="rect">
             <a:avLst/>
@@ -10728,33 +10684,33 @@
           <a:p>
             <a:pPr algn="l">
               <a:spcAft>
-                <a:spcPts val="400"/>
+                <a:spcPts val="200"/>
               </a:spcAft>
             </a:pPr>
             <a:r>
-              <a:rPr sz="1200" b="1">
-                <a:solidFill>
-                  <a:srgbClr val="66746F"/>
-                </a:solidFill>
-                <a:latin typeface="맑은 고딕"/>
-                <a:ea typeface="맑은 고딕"/>
-                <a:cs typeface="맑은 고딕"/>
+              <a:rPr sz="4400" b="1">
+                <a:solidFill>
+                  <a:srgbClr val="0E7C86"/>
+                </a:solidFill>
+                <a:latin typeface="Consolas"/>
+                <a:ea typeface="Consolas"/>
+                <a:cs typeface="Consolas"/>
               </a:rPr>
-              <a:t>원칙 2 · 숫자보다 확실한 증거</a:t>
-            </a:r>
-          </a:p>
-        </p:txBody>
-      </p:sp>
-      <p:sp>
-        <p:nvSpPr>
-          <p:cNvPr id="13" name="TextBox 12"/>
+              <a:t>2</a:t>
+            </a:r>
+          </a:p>
+        </p:txBody>
+      </p:sp>
+      <p:sp>
+        <p:nvSpPr>
+          <p:cNvPr id="12" name="TextBox 11"/>
           <p:cNvSpPr txBox="1"/>
           <p:nvPr/>
         </p:nvSpPr>
         <p:spPr>
           <a:xfrm>
-            <a:off x="914400" y="3959352"/>
-            <a:ext cx="10362895" cy="640080"/>
+            <a:off x="941832" y="4663439"/>
+            <a:ext cx="4715103" cy="365760"/>
           </a:xfrm>
           <a:prstGeom prst="rect">
             <a:avLst/>
@@ -10776,7 +10732,7 @@
               </a:spcAft>
             </a:pPr>
             <a:r>
-              <a:rPr sz="1500" b="0">
+              <a:rPr sz="1300" b="0">
                 <a:solidFill>
                   <a:srgbClr val="16201F"/>
                 </a:solidFill>
@@ -10784,7 +10740,136 @@
                 <a:ea typeface="맑은 고딕"/>
                 <a:cs typeface="맑은 고딕"/>
               </a:rPr>
-              <a:t>실제로 챗봇을 돌려보는 시연이 어떤 표보다 신뢰할 수 있는 증거다.</a:t>
+              <a:t>건 · 3부에서 기각/보류한 결정</a:t>
+            </a:r>
+          </a:p>
+        </p:txBody>
+      </p:sp>
+      <p:sp>
+        <p:nvSpPr>
+          <p:cNvPr id="13" name="Rectangle 12"/>
+          <p:cNvSpPr/>
+          <p:nvPr/>
+        </p:nvSpPr>
+        <p:spPr>
+          <a:xfrm>
+            <a:off x="6278727" y="3749039"/>
+            <a:ext cx="5227167" cy="1371600"/>
+          </a:xfrm>
+          <a:prstGeom prst="rect">
+            <a:avLst/>
+          </a:prstGeom>
+          <a:solidFill>
+            <a:srgbClr val="DCEDEE"/>
+          </a:solidFill>
+          <a:ln>
+            <a:noFill/>
+          </a:ln>
+          <a:effectLst/>
+        </p:spPr>
+        <p:style>
+          <a:lnRef idx="1">
+            <a:schemeClr val="accent1"/>
+          </a:lnRef>
+          <a:fillRef idx="3">
+            <a:schemeClr val="accent1"/>
+          </a:fillRef>
+          <a:effectRef idx="2">
+            <a:schemeClr val="accent1"/>
+          </a:effectRef>
+          <a:fontRef idx="minor">
+            <a:schemeClr val="lt1"/>
+          </a:fontRef>
+        </p:style>
+        <p:txBody>
+          <a:bodyPr rtlCol="0" anchor="ctr"/>
+          <a:lstStyle/>
+          <a:p>
+            <a:pPr algn="ctr"/>
+          </a:p>
+        </p:txBody>
+      </p:sp>
+      <p:sp>
+        <p:nvSpPr>
+          <p:cNvPr id="14" name="TextBox 13"/>
+          <p:cNvSpPr txBox="1"/>
+          <p:nvPr/>
+        </p:nvSpPr>
+        <p:spPr>
+          <a:xfrm>
+            <a:off x="6534759" y="3895343"/>
+            <a:ext cx="4715103" cy="685800"/>
+          </a:xfrm>
+          <a:prstGeom prst="rect">
+            <a:avLst/>
+          </a:prstGeom>
+          <a:noFill/>
+        </p:spPr>
+        <p:txBody>
+          <a:bodyPr wrap="square" anchor="t" lIns="0" rIns="0" tIns="0" bIns="0">
+            <a:spAutoFit/>
+          </a:bodyPr>
+          <a:lstStyle/>
+          <a:p>
+            <a:pPr algn="l">
+              <a:spcAft>
+                <a:spcPts val="200"/>
+              </a:spcAft>
+            </a:pPr>
+            <a:r>
+              <a:rPr sz="4400" b="1">
+                <a:solidFill>
+                  <a:srgbClr val="0E7C86"/>
+                </a:solidFill>
+                <a:latin typeface="Consolas"/>
+                <a:ea typeface="Consolas"/>
+                <a:cs typeface="Consolas"/>
+              </a:rPr>
+              <a:t>5</a:t>
+            </a:r>
+          </a:p>
+        </p:txBody>
+      </p:sp>
+      <p:sp>
+        <p:nvSpPr>
+          <p:cNvPr id="15" name="TextBox 14"/>
+          <p:cNvSpPr txBox="1"/>
+          <p:nvPr/>
+        </p:nvSpPr>
+        <p:spPr>
+          <a:xfrm>
+            <a:off x="6534759" y="4663439"/>
+            <a:ext cx="4715103" cy="365760"/>
+          </a:xfrm>
+          <a:prstGeom prst="rect">
+            <a:avLst/>
+          </a:prstGeom>
+          <a:noFill/>
+        </p:spPr>
+        <p:txBody>
+          <a:bodyPr wrap="square" anchor="t" lIns="0" rIns="0" tIns="0" bIns="0">
+            <a:spAutoFit/>
+          </a:bodyPr>
+          <a:lstStyle/>
+          <a:p>
+            <a:pPr algn="l">
+              <a:lnSpc>
+                <a:spcPct val="120000"/>
+              </a:lnSpc>
+              <a:spcAft>
+                <a:spcPts val="0"/>
+              </a:spcAft>
+            </a:pPr>
+            <a:r>
+              <a:rPr sz="1300" b="0">
+                <a:solidFill>
+                  <a:srgbClr val="16201F"/>
+                </a:solidFill>
+                <a:latin typeface="맑은 고딕"/>
+                <a:ea typeface="맑은 고딕"/>
+                <a:cs typeface="맑은 고딕"/>
+              </a:rPr>
+              <a:t>건 · 4부에서 교체한 검색 로직</a:t>
             </a:r>
           </a:p>
         </p:txBody>
@@ -11626,7 +11711,7 @@
                 <a:ea typeface="맑은 고딕"/>
                 <a:cs typeface="맑은 고딕"/>
               </a:rPr>
-              <a:t>오버랩 — 네 번의 반전 끝에 미사용</a:t>
+              <a:t>오버랩 — 4단계 검증으로 기각</a:t>
             </a:r>
           </a:p>
         </p:txBody>
@@ -11837,7 +11922,7 @@
                 <a:ea typeface="맑은 고딕"/>
                 <a:cs typeface="맑은 고딕"/>
               </a:rPr>
-              <a:t>반전 1</a:t>
+              <a:t>1 · 구현 정합성 검사</a:t>
             </a:r>
           </a:p>
           <a:p>
@@ -11858,7 +11943,7 @@
                 <a:ea typeface="맑은 고딕"/>
                 <a:cs typeface="맑은 고딕"/>
               </a:rPr>
-              <a:t>구현 버그로 적용률 15~30%뿐. 고쳐도 성능 그대로</a:t>
+              <a:t>적용률 15~30%만 확인 → 84~85%로 재구현</a:t>
             </a:r>
           </a:p>
         </p:txBody>
@@ -11984,7 +12069,7 @@
                 <a:ea typeface="맑은 고딕"/>
                 <a:cs typeface="맑은 고딕"/>
               </a:rPr>
-              <a:t>반전 2</a:t>
+              <a:t>2 · 원인 가설 검증</a:t>
             </a:r>
           </a:p>
           <a:p>
@@ -12005,7 +12090,7 @@
                 <a:ea typeface="맑은 고딕"/>
                 <a:cs typeface="맑은 고딕"/>
               </a:rPr>
-              <a:t>"문서가 안 잘림" 설명 오류 — 실제 41.6% 분할</a:t>
+              <a:t>"문서 미분할" 가설 기각 — 실제 41.6% 분할</a:t>
             </a:r>
           </a:p>
         </p:txBody>
@@ -12175,7 +12260,7 @@
                 <a:ea typeface="맑은 고딕"/>
                 <a:cs typeface="맑은 고딕"/>
               </a:rPr>
-              <a:t>반전 3 · 핵심</a:t>
+              <a:t>3 · 근거 경계 감사</a:t>
             </a:r>
           </a:p>
           <a:p>
@@ -12196,7 +12281,7 @@
                 <a:ea typeface="맑은 고딕"/>
                 <a:cs typeface="맑은 고딕"/>
               </a:rPr>
-              <a:t>근거 문장이 경계에 걸린 경우 96건 중 1건</a:t>
+              <a:t>96개 표본 전수 조사 → 경계 손실 1건</a:t>
             </a:r>
           </a:p>
         </p:txBody>
@@ -12322,7 +12407,7 @@
                 <a:ea typeface="맑은 고딕"/>
                 <a:cs typeface="맑은 고딕"/>
               </a:rPr>
-              <a:t>반전 4</a:t>
+              <a:t>4 · 대체 요인 통제</a:t>
             </a:r>
           </a:p>
           <a:p>
@@ -12343,7 +12428,7 @@
                 <a:ea typeface="맑은 고딕"/>
                 <a:cs typeface="맑은 고딕"/>
               </a:rPr>
-              <a:t>"헤더 효과" 주장도 재현 안 돼 철회</a:t>
+              <a:t>헤더 기여도 재현 시험 실패 → 철회</a:t>
             </a:r>
           </a:p>
         </p:txBody>
@@ -12420,7 +12505,7 @@
               </a:spcAft>
             </a:pPr>
             <a:r>
-              <a:rPr sz="3000" b="1">
+              <a:rPr sz="4000" b="1">
                 <a:solidFill>
                   <a:srgbClr val="0E7C86"/>
                 </a:solidFill>
@@ -12428,7 +12513,7 @@
                 <a:ea typeface="Consolas"/>
                 <a:cs typeface="Consolas"/>
               </a:rPr>
-              <a:t>96건 중 1건</a:t>
+              <a:t>1.04%</a:t>
             </a:r>
           </a:p>
         </p:txBody>
@@ -12472,7 +12557,7 @@
                 <a:ea typeface="맑은 고딕"/>
                 <a:cs typeface="맑은 고딕"/>
               </a:rPr>
-              <a:t>경계에 걸린 근거 문장</a:t>
+              <a:t>96건 중 경계 손실률</a:t>
             </a:r>
           </a:p>
         </p:txBody>
@@ -12486,7 +12571,7 @@
         <p:spPr>
           <a:xfrm>
             <a:off x="7909560" y="3931920"/>
-            <a:ext cx="3596335" cy="1463040"/>
+            <a:ext cx="3596335" cy="1645920"/>
           </a:xfrm>
           <a:prstGeom prst="rect">
             <a:avLst/>
@@ -12508,7 +12593,7 @@
               </a:spcAft>
             </a:pPr>
             <a:r>
-              <a:rPr sz="1300" b="0">
+              <a:rPr sz="1400" b="0">
                 <a:solidFill>
                   <a:srgbClr val="66746F"/>
                 </a:solidFill>
@@ -12516,10 +12601,10 @@
                 <a:ea typeface="맑은 고딕"/>
                 <a:cs typeface="맑은 고딕"/>
               </a:rPr>
-              <a:t>overlap은 그 1건을
-100% 복구했다.
-효과가 없던 게 아니라
-기회가 없었을 뿐.</a:t>
+              <a:t>도입 비용 대비
+개선 여지가
+통계적으로
+무의미한 수준</a:t>
             </a:r>
           </a:p>
         </p:txBody>
@@ -12622,7 +12707,7 @@
                 <a:ea typeface="맑은 고딕"/>
                 <a:cs typeface="맑은 고딕"/>
               </a:rPr>
-              <a:t>리랭킹 — 미사용, 단 근거는 불완전</a:t>
+              <a:t>리랭킹 — 재현 기준 미충족으로 보류</a:t>
             </a:r>
           </a:p>
         </p:txBody>
@@ -12751,114 +12836,27 @@
                 <a:ea typeface="맑은 고딕"/>
                 <a:cs typeface="맑은 고딕"/>
               </a:rPr>
-              <a:t>1차 검색 후보를 2차 모델로 재정렬 → 개선 미미, 지연 +2.2초</a:t>
-            </a:r>
-          </a:p>
-        </p:txBody>
-      </p:sp>
-      <p:sp>
-        <p:nvSpPr>
-          <p:cNvPr id="7" name="TextBox 6"/>
-          <p:cNvSpPr txBox="1"/>
+              <a:t>1차 검색 후보를 2차 모델로 재정렬 → 1차 실험: 개선 없음, 지연 +2.2초</a:t>
+            </a:r>
+          </a:p>
+        </p:txBody>
+      </p:sp>
+      <p:sp>
+        <p:nvSpPr>
+          <p:cNvPr id="7" name="Rectangle 6"/>
+          <p:cNvSpPr/>
           <p:nvPr/>
         </p:nvSpPr>
         <p:spPr>
           <a:xfrm>
             <a:off x="685800" y="2651760"/>
-            <a:ext cx="6583680" cy="3657600"/>
-          </a:xfrm>
-          <a:prstGeom prst="rect">
-            <a:avLst/>
-          </a:prstGeom>
-          <a:noFill/>
-        </p:spPr>
-        <p:txBody>
-          <a:bodyPr wrap="square" anchor="t" lIns="0" rIns="0" tIns="0" bIns="0">
-            <a:spAutoFit/>
-          </a:bodyPr>
-          <a:lstStyle/>
-          <a:p>
-            <a:pPr>
-              <a:lnSpc>
-                <a:spcPct val="125000"/>
-              </a:lnSpc>
-              <a:spcAft>
-                <a:spcPts val="1400"/>
-              </a:spcAft>
-            </a:pPr>
-            <a:r>
-              <a:rPr sz="1600" b="0">
-                <a:solidFill>
-                  <a:srgbClr val="0E7C86"/>
-                </a:solidFill>
-                <a:latin typeface="맑은 고딕"/>
-                <a:ea typeface="맑은 고딕"/>
-                <a:cs typeface="맑은 고딕"/>
-              </a:rPr>
-              <a:t>•  </a:t>
-            </a:r>
-            <a:r>
-              <a:rPr sz="1600" b="0">
-                <a:solidFill>
-                  <a:srgbClr val="66746F"/>
-                </a:solidFill>
-                <a:latin typeface="맑은 고딕"/>
-                <a:ea typeface="맑은 고딕"/>
-                <a:cs typeface="맑은 고딕"/>
-              </a:rPr>
-              <a:t>실험 원본 데이터 유실 — 측정 문항 수 확인 불가</a:t>
-            </a:r>
-          </a:p>
-          <a:p>
-            <a:pPr>
-              <a:lnSpc>
-                <a:spcPct val="125000"/>
-              </a:lnSpc>
-              <a:spcAft>
-                <a:spcPts val="1400"/>
-              </a:spcAft>
-            </a:pPr>
-            <a:r>
-              <a:rPr sz="1600" b="0">
-                <a:solidFill>
-                  <a:srgbClr val="0E7C86"/>
-                </a:solidFill>
-                <a:latin typeface="맑은 고딕"/>
-                <a:ea typeface="맑은 고딕"/>
-                <a:cs typeface="맑은 고딕"/>
-              </a:rPr>
-              <a:t>•  </a:t>
-            </a:r>
-            <a:r>
-              <a:rPr sz="1600" b="0">
-                <a:solidFill>
-                  <a:srgbClr val="66746F"/>
-                </a:solidFill>
-                <a:latin typeface="맑은 고딕"/>
-                <a:ea typeface="맑은 고딕"/>
-                <a:cs typeface="맑은 고딕"/>
-              </a:rPr>
-              <a:t>입력 길이(max_length) 설정 오류 가능성 재검증 못함</a:t>
-            </a:r>
-          </a:p>
-        </p:txBody>
-      </p:sp>
-      <p:sp>
-        <p:nvSpPr>
-          <p:cNvPr id="8" name="Rectangle 7"/>
-          <p:cNvSpPr/>
-          <p:nvPr/>
-        </p:nvSpPr>
-        <p:spPr>
-          <a:xfrm>
-            <a:off x="685800" y="4297680"/>
-            <a:ext cx="10820095" cy="1143000"/>
+            <a:ext cx="10820095" cy="1463040"/>
           </a:xfrm>
           <a:prstGeom prst="rect">
             <a:avLst/>
           </a:prstGeom>
           <a:solidFill>
-            <a:srgbClr val="ECE6F4"/>
+            <a:srgbClr val="DCEDEE"/>
           </a:solidFill>
           <a:ln>
             <a:noFill/>
@@ -12889,20 +12887,20 @@
       </p:sp>
       <p:sp>
         <p:nvSpPr>
-          <p:cNvPr id="9" name="Rectangle 8"/>
+          <p:cNvPr id="8" name="Rectangle 7"/>
           <p:cNvSpPr/>
           <p:nvPr/>
         </p:nvSpPr>
         <p:spPr>
           <a:xfrm>
-            <a:off x="685800" y="4297680"/>
-            <a:ext cx="50800" cy="1143000"/>
+            <a:off x="685800" y="2651760"/>
+            <a:ext cx="50800" cy="1463040"/>
           </a:xfrm>
           <a:prstGeom prst="rect">
             <a:avLst/>
           </a:prstGeom>
           <a:solidFill>
-            <a:srgbClr val="5B3E8A"/>
+            <a:srgbClr val="0E7C86"/>
           </a:solidFill>
           <a:ln>
             <a:noFill/>
@@ -12933,13 +12931,13 @@
       </p:sp>
       <p:sp>
         <p:nvSpPr>
-          <p:cNvPr id="10" name="TextBox 9"/>
+          <p:cNvPr id="9" name="TextBox 8"/>
           <p:cNvSpPr txBox="1"/>
           <p:nvPr/>
         </p:nvSpPr>
         <p:spPr>
           <a:xfrm>
-            <a:off x="914400" y="4425696"/>
+            <a:off x="914400" y="2779776"/>
             <a:ext cx="10362895" cy="274320"/>
           </a:xfrm>
           <a:prstGeom prst="rect">
@@ -12961,27 +12959,27 @@
             <a:r>
               <a:rPr sz="1200" b="1">
                 <a:solidFill>
-                  <a:srgbClr val="5B3E8A"/>
+                  <a:srgbClr val="0E7C86"/>
                 </a:solidFill>
                 <a:latin typeface="맑은 고딕"/>
                 <a:ea typeface="맑은 고딕"/>
                 <a:cs typeface="맑은 고딕"/>
               </a:rPr>
-              <a:t>이 프로젝트에서 유일하게 확정되지 않은 결론</a:t>
-            </a:r>
-          </a:p>
-        </p:txBody>
-      </p:sp>
-      <p:sp>
-        <p:nvSpPr>
-          <p:cNvPr id="11" name="TextBox 10"/>
+              <a:t>채택 기준</a:t>
+            </a:r>
+          </a:p>
+        </p:txBody>
+      </p:sp>
+      <p:sp>
+        <p:nvSpPr>
+          <p:cNvPr id="10" name="TextBox 9"/>
           <p:cNvSpPr txBox="1"/>
           <p:nvPr/>
         </p:nvSpPr>
         <p:spPr>
           <a:xfrm>
-            <a:off x="914400" y="4736592"/>
-            <a:ext cx="10362895" cy="594360"/>
+            <a:off x="914400" y="3090672"/>
+            <a:ext cx="10362895" cy="914400"/>
           </a:xfrm>
           <a:prstGeom prst="rect">
             <a:avLst/>
@@ -13011,7 +13009,51 @@
                 <a:ea typeface="맑은 고딕"/>
                 <a:cs typeface="맑은 고딕"/>
               </a:rPr>
-              <a:t>근거 자료가 남아 있지 않아, 재검증 전까지는 "현재 설정 기준"이라는 단서를 붙인다.</a:t>
+              <a:t>재현 가능한 벤치마크로 재확인되지 않은 결과는 프로덕션에 반영하지 않는다. 리랭킹 설정을 포함해 재현 벤치마크를 재구성하는 중이며, 그 전까지는 도입하지 않는다.</a:t>
+            </a:r>
+          </a:p>
+        </p:txBody>
+      </p:sp>
+      <p:sp>
+        <p:nvSpPr>
+          <p:cNvPr id="11" name="TextBox 10"/>
+          <p:cNvSpPr txBox="1"/>
+          <p:nvPr/>
+        </p:nvSpPr>
+        <p:spPr>
+          <a:xfrm>
+            <a:off x="685800" y="4480560"/>
+            <a:ext cx="10820095" cy="548640"/>
+          </a:xfrm>
+          <a:prstGeom prst="rect">
+            <a:avLst/>
+          </a:prstGeom>
+          <a:noFill/>
+        </p:spPr>
+        <p:txBody>
+          <a:bodyPr wrap="square" anchor="t" lIns="0" rIns="0" tIns="0" bIns="0">
+            <a:spAutoFit/>
+          </a:bodyPr>
+          <a:lstStyle/>
+          <a:p>
+            <a:pPr algn="l">
+              <a:lnSpc>
+                <a:spcPct val="130000"/>
+              </a:lnSpc>
+              <a:spcAft>
+                <a:spcPts val="0"/>
+              </a:spcAft>
+            </a:pPr>
+            <a:r>
+              <a:rPr sz="1500" b="1">
+                <a:solidFill>
+                  <a:srgbClr val="16201F"/>
+                </a:solidFill>
+                <a:latin typeface="맑은 고딕"/>
+                <a:ea typeface="맑은 고딕"/>
+                <a:cs typeface="맑은 고딕"/>
+              </a:rPr>
+              <a:t>→ 리랭킹 보류. "효과 없다"를 결론으로 내세우는 대신, 검증 기준을 통과 못 한 채택은 하지 않는다.</a:t>
             </a:r>
           </a:p>
         </p:txBody>
@@ -13114,7 +13156,7 @@
                 <a:ea typeface="맑은 고딕"/>
                 <a:cs typeface="맑은 고딕"/>
               </a:rPr>
-              <a:t>최종 채택 — 청킹 500 / 오버랩 X / 리랭킹 X</a:t>
+              <a:t>청킹 500 / 오버랩 X / 리랭킹 보류 — 셋 다 데이터로 결정</a:t>
             </a:r>
           </a:p>
         </p:txBody>
@@ -13346,7 +13388,7 @@
                 <a:ea typeface="맑은 고딕"/>
                 <a:cs typeface="맑은 고딕"/>
               </a:rPr>
-              <a:t>500토큰</a:t>
+              <a:t>채택</a:t>
             </a:r>
           </a:p>
           <a:p>
@@ -13385,7 +13427,7 @@
                 <a:ea typeface="맑은 고딕"/>
                 <a:cs typeface="맑은 고딕"/>
               </a:rPr>
-              <a:t>채택</a:t>
+              <a:t>500토큰 고정</a:t>
             </a:r>
           </a:p>
         </p:txBody>
@@ -13532,7 +13574,7 @@
                 <a:ea typeface="맑은 고딕"/>
                 <a:cs typeface="맑은 고딕"/>
               </a:rPr>
-              <a:t>미사용</a:t>
+              <a:t>미채택</a:t>
             </a:r>
           </a:p>
           <a:p>
@@ -13553,7 +13595,7 @@
                 <a:ea typeface="맑은 고딕"/>
                 <a:cs typeface="맑은 고딕"/>
               </a:rPr>
-              <a:t>경계 걸림 96건 중 1건뿐</a:t>
+              <a:t>96건 전수 감사 · 손실률 1.04%</a:t>
             </a:r>
           </a:p>
           <a:p>
@@ -13571,7 +13613,7 @@
                 <a:ea typeface="맑은 고딕"/>
                 <a:cs typeface="맑은 고딕"/>
               </a:rPr>
-              <a:t>미채택</a:t>
+              <a:t>통계적으로 무의미</a:t>
             </a:r>
           </a:p>
         </p:txBody>
@@ -13718,7 +13760,7 @@
                 <a:ea typeface="맑은 고딕"/>
                 <a:cs typeface="맑은 고딕"/>
               </a:rPr>
-              <a:t>미사용</a:t>
+              <a:t>보류</a:t>
             </a:r>
           </a:p>
           <a:p>
@@ -13739,7 +13781,7 @@
                 <a:ea typeface="맑은 고딕"/>
                 <a:cs typeface="맑은 고딕"/>
               </a:rPr>
-              <a:t>개선 미미 + 지연 증가</a:t>
+              <a:t>재현 벤치마크 기준 미충족</a:t>
             </a:r>
           </a:p>
           <a:p>
@@ -13757,7 +13799,7 @@
                 <a:ea typeface="맑은 고딕"/>
                 <a:cs typeface="맑은 고딕"/>
               </a:rPr>
-              <a:t>미채택 (재검증 필요)</a:t>
+              <a:t>재구성 후 재평가</a:t>
             </a:r>
           </a:p>
         </p:txBody>
